--- a/3-Apprentissage automatique/1-soldes Walmart/doc/Walmart_Presentation.pptx
+++ b/3-Apprentissage automatique/1-soldes Walmart/doc/Walmart_Presentation.pptx
@@ -11550,7 +11550,7 @@
                 <a:ea typeface="Calibri" pitchFamily="34" charset="-122"/>
                 <a:cs typeface="Calibri" pitchFamily="34" charset="-120"/>
               </a:rPr>
-              <a:t>Aucune variable isolée n'est fortement corrélée a la cible (max |r| = 0.29). Combinaison nécessaire.</a:t>
+              <a:t>Aucune variable isolée n'est fortement corrélée à la cible (max |r| = 0.29). Combinaison nécessaire.</a:t>
             </a:r>
             <a:endParaRPr lang="fr-FR" sz="1000" noProof="0" dirty="0"/>
           </a:p>
@@ -15122,7 +15122,7 @@
                 <a:ea typeface="Calibri" pitchFamily="34" charset="-122"/>
                 <a:cs typeface="Calibri" pitchFamily="34" charset="-120"/>
               </a:rPr>
-              <a:t>Pénalise la somme des carres des coefficients (L2). Réduit tous les coefficients sans les annuler.</a:t>
+              <a:t>Pénalise la somme des carrés des coefficients (L2). Réduit tous les coefficients sans les annuler.</a:t>
             </a:r>
             <a:endParaRPr lang="fr-FR" sz="1100" noProof="0" dirty="0"/>
           </a:p>

--- a/3-Apprentissage automatique/1-soldes Walmart/doc/Walmart_Presentation.pptx
+++ b/3-Apprentissage automatique/1-soldes Walmart/doc/Walmart_Presentation.pptx
@@ -13,9 +13,14 @@
     <p:sldId id="258" r:id="rId4"/>
     <p:sldId id="259" r:id="rId5"/>
     <p:sldId id="260" r:id="rId6"/>
+    <p:sldId id="268" r:id="rId19"/>
+    <p:sldId id="269" r:id="rId20"/>
+    <p:sldId id="270" r:id="rId21"/>
     <p:sldId id="261" r:id="rId7"/>
     <p:sldId id="262" r:id="rId8"/>
+    <p:sldId id="271" r:id="rId22"/>
     <p:sldId id="263" r:id="rId9"/>
+    <p:sldId id="272" r:id="rId23"/>
     <p:sldId id="264" r:id="rId10"/>
     <p:sldId id="265" r:id="rId11"/>
     <p:sldId id="267" r:id="rId12"/>
@@ -5401,6 +5406,786 @@
               <a:t>Modèle retenu</a:t>
             </a:r>
             <a:endParaRPr lang="fr-FR" sz="900" noProof="0" dirty="0"/>
+          </a:p>
+        </p:txBody>
+      </p:sp>
+    </p:spTree>
+  </p:cSld>
+  <p:clrMapOvr>
+    <a:masterClrMapping/>
+  </p:clrMapOvr>
+</p:sld>
+</file>
+
+<file path=ppt/slides/slide13.xml><?xml version="1.0" encoding="utf-8"?>
+<p:sld xmlns:a="http://schemas.openxmlformats.org/drawingml/2006/main" xmlns:p="http://schemas.openxmlformats.org/presentationml/2006/main" xmlns:r="http://schemas.openxmlformats.org/officeDocument/2006/relationships">
+  <p:cSld>
+    <p:spTree>
+      <p:nvGrpSpPr>
+        <p:cNvPr id="1" name=""/>
+        <p:cNvGrpSpPr/>
+        <p:nvPr/>
+      </p:nvGrpSpPr>
+      <p:grpSpPr/>
+      <p:sp>
+        <p:nvSpPr>
+          <p:cNvPr id="2" name="Rectangle 1"/>
+          <p:cNvSpPr/>
+          <p:nvPr/>
+        </p:nvSpPr>
+        <p:spPr>
+          <a:xfrm>
+            <a:off x="0" y="0"/>
+            <a:ext cx="9144000" cy="685800"/>
+          </a:xfrm>
+          <a:prstGeom prst="rect">
+            <a:avLst/>
+          </a:prstGeom>
+          <a:solidFill>
+            <a:srgbClr val="1E2761"/>
+          </a:solidFill>
+          <a:ln>
+            <a:noFill/>
+          </a:ln>
+          <a:effectLst/>
+        </p:spPr>
+        <p:style>
+          <a:lnRef idx="1">
+            <a:schemeClr val="accent1"/>
+          </a:lnRef>
+          <a:fillRef idx="3">
+            <a:schemeClr val="accent1"/>
+          </a:fillRef>
+          <a:effectRef idx="2">
+            <a:schemeClr val="accent1"/>
+          </a:effectRef>
+          <a:fontRef idx="minor">
+            <a:schemeClr val="lt1"/>
+          </a:fontRef>
+        </p:style>
+        <p:txBody>
+          <a:bodyPr rtlCol="0" anchor="ctr"/>
+          <a:lstStyle/>
+          <a:p>
+            <a:pPr algn="ctr"/>
+          </a:p>
+        </p:txBody>
+      </p:sp>
+      <p:sp>
+        <p:nvSpPr>
+          <p:cNvPr id="3" name="TextBox 2"/>
+          <p:cNvSpPr txBox="1"/>
+          <p:nvPr/>
+        </p:nvSpPr>
+        <p:spPr>
+          <a:xfrm>
+            <a:off x="365760" y="120000"/>
+            <a:ext cx="8412480" cy="440000"/>
+          </a:xfrm>
+          <a:prstGeom prst="rect">
+            <a:avLst/>
+          </a:prstGeom>
+          <a:noFill/>
+        </p:spPr>
+        <p:txBody>
+          <a:bodyPr wrap="square" anchor="ctr">
+            <a:spAutoFit/>
+          </a:bodyPr>
+          <a:lstStyle/>
+          <a:p>
+            <a:pPr algn="l"/>
+            <a:r>
+              <a:rPr sz="2200" b="1">
+                <a:solidFill>
+                  <a:srgbClr val="FFFFFF"/>
+                </a:solidFill>
+                <a:latin typeface="Calibri"/>
+              </a:rPr>
+              <a:t>Analyse exploratoire - Distribution des ventes</a:t>
+            </a:r>
+          </a:p>
+        </p:txBody>
+      </p:sp>
+      <p:pic>
+        <p:nvPicPr>
+          <p:cNvPr id="4" name="Picture 3" descr="g01.png"/>
+          <p:cNvPicPr>
+            <a:picLocks noChangeAspect="1"/>
+          </p:cNvPicPr>
+          <p:nvPr/>
+        </p:nvPicPr>
+        <p:blipFill>
+          <a:blip r:embed="rId2"/>
+          <a:stretch>
+            <a:fillRect/>
+          </a:stretch>
+        </p:blipFill>
+        <p:spPr>
+          <a:xfrm>
+            <a:off x="365760" y="1463782"/>
+            <a:ext cx="8412480" cy="2582435"/>
+          </a:xfrm>
+          <a:prstGeom prst="rect">
+            <a:avLst/>
+          </a:prstGeom>
+        </p:spPr>
+      </p:pic>
+      <p:sp>
+        <p:nvSpPr>
+          <p:cNvPr id="5" name="TextBox 4"/>
+          <p:cNvSpPr txBox="1"/>
+          <p:nvPr/>
+        </p:nvSpPr>
+        <p:spPr>
+          <a:xfrm>
+            <a:off x="365760" y="4720000"/>
+            <a:ext cx="8412480" cy="340000"/>
+          </a:xfrm>
+          <a:prstGeom prst="rect">
+            <a:avLst/>
+          </a:prstGeom>
+          <a:noFill/>
+        </p:spPr>
+        <p:txBody>
+          <a:bodyPr wrap="square">
+            <a:spAutoFit/>
+          </a:bodyPr>
+          <a:lstStyle/>
+          <a:p>
+            <a:pPr algn="ctr"/>
+            <a:r>
+              <a:rPr sz="1100" i="1">
+                <a:solidFill>
+                  <a:srgbClr val="374151"/>
+                </a:solidFill>
+                <a:latin typeface="Calibri"/>
+              </a:rPr>
+              <a:t>Distribution bimodale des ventes (270k$ à 2,8M$) : deux groupes de magasins aux profils distincts.</a:t>
+            </a:r>
+          </a:p>
+        </p:txBody>
+      </p:sp>
+    </p:spTree>
+  </p:cSld>
+  <p:clrMapOvr>
+    <a:masterClrMapping/>
+  </p:clrMapOvr>
+</p:sld>
+</file>
+
+<file path=ppt/slides/slide14.xml><?xml version="1.0" encoding="utf-8"?>
+<p:sld xmlns:a="http://schemas.openxmlformats.org/drawingml/2006/main" xmlns:p="http://schemas.openxmlformats.org/presentationml/2006/main" xmlns:r="http://schemas.openxmlformats.org/officeDocument/2006/relationships">
+  <p:cSld>
+    <p:spTree>
+      <p:nvGrpSpPr>
+        <p:cNvPr id="1" name=""/>
+        <p:cNvGrpSpPr/>
+        <p:nvPr/>
+      </p:nvGrpSpPr>
+      <p:grpSpPr/>
+      <p:sp>
+        <p:nvSpPr>
+          <p:cNvPr id="2" name="Rectangle 1"/>
+          <p:cNvSpPr/>
+          <p:nvPr/>
+        </p:nvSpPr>
+        <p:spPr>
+          <a:xfrm>
+            <a:off x="0" y="0"/>
+            <a:ext cx="9144000" cy="685800"/>
+          </a:xfrm>
+          <a:prstGeom prst="rect">
+            <a:avLst/>
+          </a:prstGeom>
+          <a:solidFill>
+            <a:srgbClr val="1E2761"/>
+          </a:solidFill>
+          <a:ln>
+            <a:noFill/>
+          </a:ln>
+          <a:effectLst/>
+        </p:spPr>
+        <p:style>
+          <a:lnRef idx="1">
+            <a:schemeClr val="accent1"/>
+          </a:lnRef>
+          <a:fillRef idx="3">
+            <a:schemeClr val="accent1"/>
+          </a:fillRef>
+          <a:effectRef idx="2">
+            <a:schemeClr val="accent1"/>
+          </a:effectRef>
+          <a:fontRef idx="minor">
+            <a:schemeClr val="lt1"/>
+          </a:fontRef>
+        </p:style>
+        <p:txBody>
+          <a:bodyPr rtlCol="0" anchor="ctr"/>
+          <a:lstStyle/>
+          <a:p>
+            <a:pPr algn="ctr"/>
+          </a:p>
+        </p:txBody>
+      </p:sp>
+      <p:sp>
+        <p:nvSpPr>
+          <p:cNvPr id="3" name="TextBox 2"/>
+          <p:cNvSpPr txBox="1"/>
+          <p:nvPr/>
+        </p:nvSpPr>
+        <p:spPr>
+          <a:xfrm>
+            <a:off x="365760" y="120000"/>
+            <a:ext cx="8412480" cy="440000"/>
+          </a:xfrm>
+          <a:prstGeom prst="rect">
+            <a:avLst/>
+          </a:prstGeom>
+          <a:noFill/>
+        </p:spPr>
+        <p:txBody>
+          <a:bodyPr wrap="square" anchor="ctr">
+            <a:spAutoFit/>
+          </a:bodyPr>
+          <a:lstStyle/>
+          <a:p>
+            <a:pPr algn="l"/>
+            <a:r>
+              <a:rPr sz="2200" b="1">
+                <a:solidFill>
+                  <a:srgbClr val="FFFFFF"/>
+                </a:solidFill>
+                <a:latin typeface="Calibri"/>
+              </a:rPr>
+              <a:t>Analyse exploratoire - Indicateurs économiques</a:t>
+            </a:r>
+          </a:p>
+        </p:txBody>
+      </p:sp>
+      <p:pic>
+        <p:nvPicPr>
+          <p:cNvPr id="4" name="Picture 3" descr="g04.png"/>
+          <p:cNvPicPr>
+            <a:picLocks noChangeAspect="1"/>
+          </p:cNvPicPr>
+          <p:nvPr/>
+        </p:nvPicPr>
+        <p:blipFill>
+          <a:blip r:embed="rId2"/>
+          <a:stretch>
+            <a:fillRect/>
+          </a:stretch>
+        </p:blipFill>
+        <p:spPr>
+          <a:xfrm>
+            <a:off x="1466594" y="830000"/>
+            <a:ext cx="6210812" cy="3850000"/>
+          </a:xfrm>
+          <a:prstGeom prst="rect">
+            <a:avLst/>
+          </a:prstGeom>
+        </p:spPr>
+      </p:pic>
+      <p:sp>
+        <p:nvSpPr>
+          <p:cNvPr id="5" name="TextBox 4"/>
+          <p:cNvSpPr txBox="1"/>
+          <p:nvPr/>
+        </p:nvSpPr>
+        <p:spPr>
+          <a:xfrm>
+            <a:off x="365760" y="4720000"/>
+            <a:ext cx="8412480" cy="340000"/>
+          </a:xfrm>
+          <a:prstGeom prst="rect">
+            <a:avLst/>
+          </a:prstGeom>
+          <a:noFill/>
+        </p:spPr>
+        <p:txBody>
+          <a:bodyPr wrap="square">
+            <a:spAutoFit/>
+          </a:bodyPr>
+          <a:lstStyle/>
+          <a:p>
+            <a:pPr algn="ctr"/>
+            <a:r>
+              <a:rPr sz="1100" i="1">
+                <a:solidFill>
+                  <a:srgbClr val="374151"/>
+                </a:solidFill>
+                <a:latin typeface="Calibri"/>
+              </a:rPr>
+              <a:t>Impact des indicateurs sur les ventes : les semaines de fêtes génèrent en moyenne +7,5 % de ventes.</a:t>
+            </a:r>
+          </a:p>
+        </p:txBody>
+      </p:sp>
+    </p:spTree>
+  </p:cSld>
+  <p:clrMapOvr>
+    <a:masterClrMapping/>
+  </p:clrMapOvr>
+</p:sld>
+</file>
+
+<file path=ppt/slides/slide15.xml><?xml version="1.0" encoding="utf-8"?>
+<p:sld xmlns:a="http://schemas.openxmlformats.org/drawingml/2006/main" xmlns:p="http://schemas.openxmlformats.org/presentationml/2006/main" xmlns:r="http://schemas.openxmlformats.org/officeDocument/2006/relationships">
+  <p:cSld>
+    <p:spTree>
+      <p:nvGrpSpPr>
+        <p:cNvPr id="1" name=""/>
+        <p:cNvGrpSpPr/>
+        <p:nvPr/>
+      </p:nvGrpSpPr>
+      <p:grpSpPr/>
+      <p:sp>
+        <p:nvSpPr>
+          <p:cNvPr id="2" name="Rectangle 1"/>
+          <p:cNvSpPr/>
+          <p:nvPr/>
+        </p:nvSpPr>
+        <p:spPr>
+          <a:xfrm>
+            <a:off x="0" y="0"/>
+            <a:ext cx="9144000" cy="685800"/>
+          </a:xfrm>
+          <a:prstGeom prst="rect">
+            <a:avLst/>
+          </a:prstGeom>
+          <a:solidFill>
+            <a:srgbClr val="1E2761"/>
+          </a:solidFill>
+          <a:ln>
+            <a:noFill/>
+          </a:ln>
+          <a:effectLst/>
+        </p:spPr>
+        <p:style>
+          <a:lnRef idx="1">
+            <a:schemeClr val="accent1"/>
+          </a:lnRef>
+          <a:fillRef idx="3">
+            <a:schemeClr val="accent1"/>
+          </a:fillRef>
+          <a:effectRef idx="2">
+            <a:schemeClr val="accent1"/>
+          </a:effectRef>
+          <a:fontRef idx="minor">
+            <a:schemeClr val="lt1"/>
+          </a:fontRef>
+        </p:style>
+        <p:txBody>
+          <a:bodyPr rtlCol="0" anchor="ctr"/>
+          <a:lstStyle/>
+          <a:p>
+            <a:pPr algn="ctr"/>
+          </a:p>
+        </p:txBody>
+      </p:sp>
+      <p:sp>
+        <p:nvSpPr>
+          <p:cNvPr id="3" name="TextBox 2"/>
+          <p:cNvSpPr txBox="1"/>
+          <p:nvPr/>
+        </p:nvSpPr>
+        <p:spPr>
+          <a:xfrm>
+            <a:off x="365760" y="120000"/>
+            <a:ext cx="8412480" cy="440000"/>
+          </a:xfrm>
+          <a:prstGeom prst="rect">
+            <a:avLst/>
+          </a:prstGeom>
+          <a:noFill/>
+        </p:spPr>
+        <p:txBody>
+          <a:bodyPr wrap="square" anchor="ctr">
+            <a:spAutoFit/>
+          </a:bodyPr>
+          <a:lstStyle/>
+          <a:p>
+            <a:pPr algn="l"/>
+            <a:r>
+              <a:rPr sz="2200" b="1">
+                <a:solidFill>
+                  <a:srgbClr val="FFFFFF"/>
+                </a:solidFill>
+                <a:latin typeface="Calibri"/>
+              </a:rPr>
+              <a:t>Analyse exploratoire - Matrice de corrélation</a:t>
+            </a:r>
+          </a:p>
+        </p:txBody>
+      </p:sp>
+      <p:pic>
+        <p:nvPicPr>
+          <p:cNvPr id="4" name="Picture 3" descr="g05.png"/>
+          <p:cNvPicPr>
+            <a:picLocks noChangeAspect="1"/>
+          </p:cNvPicPr>
+          <p:nvPr/>
+        </p:nvPicPr>
+        <p:blipFill>
+          <a:blip r:embed="rId2"/>
+          <a:stretch>
+            <a:fillRect/>
+          </a:stretch>
+        </p:blipFill>
+        <p:spPr>
+          <a:xfrm>
+            <a:off x="2399034" y="830000"/>
+            <a:ext cx="4345932" cy="3850000"/>
+          </a:xfrm>
+          <a:prstGeom prst="rect">
+            <a:avLst/>
+          </a:prstGeom>
+        </p:spPr>
+      </p:pic>
+      <p:sp>
+        <p:nvSpPr>
+          <p:cNvPr id="5" name="TextBox 4"/>
+          <p:cNvSpPr txBox="1"/>
+          <p:nvPr/>
+        </p:nvSpPr>
+        <p:spPr>
+          <a:xfrm>
+            <a:off x="365760" y="4720000"/>
+            <a:ext cx="8412480" cy="340000"/>
+          </a:xfrm>
+          <a:prstGeom prst="rect">
+            <a:avLst/>
+          </a:prstGeom>
+          <a:noFill/>
+        </p:spPr>
+        <p:txBody>
+          <a:bodyPr wrap="square">
+            <a:spAutoFit/>
+          </a:bodyPr>
+          <a:lstStyle/>
+          <a:p>
+            <a:pPr algn="ctr"/>
+            <a:r>
+              <a:rPr sz="1100" i="1">
+                <a:solidFill>
+                  <a:srgbClr val="374151"/>
+                </a:solidFill>
+                <a:latin typeface="Calibri"/>
+              </a:rPr>
+              <a:t>Aucune variable seule n'est fortement corrélée à la cible (|r| max = 0,29) : leur combinaison est nécessaire.</a:t>
+            </a:r>
+          </a:p>
+        </p:txBody>
+      </p:sp>
+    </p:spTree>
+  </p:cSld>
+  <p:clrMapOvr>
+    <a:masterClrMapping/>
+  </p:clrMapOvr>
+</p:sld>
+</file>
+
+<file path=ppt/slides/slide16.xml><?xml version="1.0" encoding="utf-8"?>
+<p:sld xmlns:a="http://schemas.openxmlformats.org/drawingml/2006/main" xmlns:p="http://schemas.openxmlformats.org/presentationml/2006/main" xmlns:r="http://schemas.openxmlformats.org/officeDocument/2006/relationships">
+  <p:cSld>
+    <p:spTree>
+      <p:nvGrpSpPr>
+        <p:cNvPr id="1" name=""/>
+        <p:cNvGrpSpPr/>
+        <p:nvPr/>
+      </p:nvGrpSpPr>
+      <p:grpSpPr/>
+      <p:sp>
+        <p:nvSpPr>
+          <p:cNvPr id="2" name="Rectangle 1"/>
+          <p:cNvSpPr/>
+          <p:nvPr/>
+        </p:nvSpPr>
+        <p:spPr>
+          <a:xfrm>
+            <a:off x="0" y="0"/>
+            <a:ext cx="9144000" cy="685800"/>
+          </a:xfrm>
+          <a:prstGeom prst="rect">
+            <a:avLst/>
+          </a:prstGeom>
+          <a:solidFill>
+            <a:srgbClr val="1E2761"/>
+          </a:solidFill>
+          <a:ln>
+            <a:noFill/>
+          </a:ln>
+          <a:effectLst/>
+        </p:spPr>
+        <p:style>
+          <a:lnRef idx="1">
+            <a:schemeClr val="accent1"/>
+          </a:lnRef>
+          <a:fillRef idx="3">
+            <a:schemeClr val="accent1"/>
+          </a:fillRef>
+          <a:effectRef idx="2">
+            <a:schemeClr val="accent1"/>
+          </a:effectRef>
+          <a:fontRef idx="minor">
+            <a:schemeClr val="lt1"/>
+          </a:fontRef>
+        </p:style>
+        <p:txBody>
+          <a:bodyPr rtlCol="0" anchor="ctr"/>
+          <a:lstStyle/>
+          <a:p>
+            <a:pPr algn="ctr"/>
+          </a:p>
+        </p:txBody>
+      </p:sp>
+      <p:sp>
+        <p:nvSpPr>
+          <p:cNvPr id="3" name="TextBox 2"/>
+          <p:cNvSpPr txBox="1"/>
+          <p:nvPr/>
+        </p:nvSpPr>
+        <p:spPr>
+          <a:xfrm>
+            <a:off x="365760" y="120000"/>
+            <a:ext cx="8412480" cy="440000"/>
+          </a:xfrm>
+          <a:prstGeom prst="rect">
+            <a:avLst/>
+          </a:prstGeom>
+          <a:noFill/>
+        </p:spPr>
+        <p:txBody>
+          <a:bodyPr wrap="square" anchor="ctr">
+            <a:spAutoFit/>
+          </a:bodyPr>
+          <a:lstStyle/>
+          <a:p>
+            <a:pPr algn="l"/>
+            <a:r>
+              <a:rPr sz="2200" b="1">
+                <a:solidFill>
+                  <a:srgbClr val="FFFFFF"/>
+                </a:solidFill>
+                <a:latin typeface="Calibri"/>
+              </a:rPr>
+              <a:t>Diagnostic du modèle - Régression linéaire</a:t>
+            </a:r>
+          </a:p>
+        </p:txBody>
+      </p:sp>
+      <p:pic>
+        <p:nvPicPr>
+          <p:cNvPr id="4" name="Picture 3" descr="g07.png"/>
+          <p:cNvPicPr>
+            <a:picLocks noChangeAspect="1"/>
+          </p:cNvPicPr>
+          <p:nvPr/>
+        </p:nvPicPr>
+        <p:blipFill>
+          <a:blip r:embed="rId2"/>
+          <a:stretch>
+            <a:fillRect/>
+          </a:stretch>
+        </p:blipFill>
+        <p:spPr>
+          <a:xfrm>
+            <a:off x="365760" y="1139726"/>
+            <a:ext cx="8412480" cy="3230548"/>
+          </a:xfrm>
+          <a:prstGeom prst="rect">
+            <a:avLst/>
+          </a:prstGeom>
+        </p:spPr>
+      </p:pic>
+      <p:sp>
+        <p:nvSpPr>
+          <p:cNvPr id="5" name="TextBox 4"/>
+          <p:cNvSpPr txBox="1"/>
+          <p:nvPr/>
+        </p:nvSpPr>
+        <p:spPr>
+          <a:xfrm>
+            <a:off x="365760" y="4720000"/>
+            <a:ext cx="8412480" cy="340000"/>
+          </a:xfrm>
+          <a:prstGeom prst="rect">
+            <a:avLst/>
+          </a:prstGeom>
+          <a:noFill/>
+        </p:spPr>
+        <p:txBody>
+          <a:bodyPr wrap="square">
+            <a:spAutoFit/>
+          </a:bodyPr>
+          <a:lstStyle/>
+          <a:p>
+            <a:pPr algn="ctr"/>
+            <a:r>
+              <a:rPr sz="1100" i="1">
+                <a:solidFill>
+                  <a:srgbClr val="374151"/>
+                </a:solidFill>
+                <a:latin typeface="Calibri"/>
+              </a:rPr>
+              <a:t>Predicted vs Actual et résidus : prédictions alignées sur la droite parfaite, résidus centrés sur zéro.</a:t>
+            </a:r>
+          </a:p>
+        </p:txBody>
+      </p:sp>
+    </p:spTree>
+  </p:cSld>
+  <p:clrMapOvr>
+    <a:masterClrMapping/>
+  </p:clrMapOvr>
+</p:sld>
+</file>
+
+<file path=ppt/slides/slide17.xml><?xml version="1.0" encoding="utf-8"?>
+<p:sld xmlns:a="http://schemas.openxmlformats.org/drawingml/2006/main" xmlns:p="http://schemas.openxmlformats.org/presentationml/2006/main" xmlns:r="http://schemas.openxmlformats.org/officeDocument/2006/relationships">
+  <p:cSld>
+    <p:spTree>
+      <p:nvGrpSpPr>
+        <p:cNvPr id="1" name=""/>
+        <p:cNvGrpSpPr/>
+        <p:nvPr/>
+      </p:nvGrpSpPr>
+      <p:grpSpPr/>
+      <p:sp>
+        <p:nvSpPr>
+          <p:cNvPr id="2" name="Rectangle 1"/>
+          <p:cNvSpPr/>
+          <p:nvPr/>
+        </p:nvSpPr>
+        <p:spPr>
+          <a:xfrm>
+            <a:off x="0" y="0"/>
+            <a:ext cx="9144000" cy="685800"/>
+          </a:xfrm>
+          <a:prstGeom prst="rect">
+            <a:avLst/>
+          </a:prstGeom>
+          <a:solidFill>
+            <a:srgbClr val="1E2761"/>
+          </a:solidFill>
+          <a:ln>
+            <a:noFill/>
+          </a:ln>
+          <a:effectLst/>
+        </p:spPr>
+        <p:style>
+          <a:lnRef idx="1">
+            <a:schemeClr val="accent1"/>
+          </a:lnRef>
+          <a:fillRef idx="3">
+            <a:schemeClr val="accent1"/>
+          </a:fillRef>
+          <a:effectRef idx="2">
+            <a:schemeClr val="accent1"/>
+          </a:effectRef>
+          <a:fontRef idx="minor">
+            <a:schemeClr val="lt1"/>
+          </a:fontRef>
+        </p:style>
+        <p:txBody>
+          <a:bodyPr rtlCol="0" anchor="ctr"/>
+          <a:lstStyle/>
+          <a:p>
+            <a:pPr algn="ctr"/>
+          </a:p>
+        </p:txBody>
+      </p:sp>
+      <p:sp>
+        <p:nvSpPr>
+          <p:cNvPr id="3" name="TextBox 2"/>
+          <p:cNvSpPr txBox="1"/>
+          <p:nvPr/>
+        </p:nvSpPr>
+        <p:spPr>
+          <a:xfrm>
+            <a:off x="365760" y="120000"/>
+            <a:ext cx="8412480" cy="440000"/>
+          </a:xfrm>
+          <a:prstGeom prst="rect">
+            <a:avLst/>
+          </a:prstGeom>
+          <a:noFill/>
+        </p:spPr>
+        <p:txBody>
+          <a:bodyPr wrap="square" anchor="ctr">
+            <a:spAutoFit/>
+          </a:bodyPr>
+          <a:lstStyle/>
+          <a:p>
+            <a:pPr algn="l"/>
+            <a:r>
+              <a:rPr sz="2200" b="1">
+                <a:solidFill>
+                  <a:srgbClr val="FFFFFF"/>
+                </a:solidFill>
+                <a:latin typeface="Calibri"/>
+              </a:rPr>
+              <a:t>Régularisation - Choix de alpha (Ridge)</a:t>
+            </a:r>
+          </a:p>
+        </p:txBody>
+      </p:sp>
+      <p:pic>
+        <p:nvPicPr>
+          <p:cNvPr id="4" name="Picture 3" descr="g09.png"/>
+          <p:cNvPicPr>
+            <a:picLocks noChangeAspect="1"/>
+          </p:cNvPicPr>
+          <p:nvPr/>
+        </p:nvPicPr>
+        <p:blipFill>
+          <a:blip r:embed="rId2"/>
+          <a:stretch>
+            <a:fillRect/>
+          </a:stretch>
+        </p:blipFill>
+        <p:spPr>
+          <a:xfrm>
+            <a:off x="1166231" y="830000"/>
+            <a:ext cx="6811538" cy="3849999"/>
+          </a:xfrm>
+          <a:prstGeom prst="rect">
+            <a:avLst/>
+          </a:prstGeom>
+        </p:spPr>
+      </p:pic>
+      <p:sp>
+        <p:nvSpPr>
+          <p:cNvPr id="5" name="TextBox 4"/>
+          <p:cNvSpPr txBox="1"/>
+          <p:nvPr/>
+        </p:nvSpPr>
+        <p:spPr>
+          <a:xfrm>
+            <a:off x="365760" y="4720000"/>
+            <a:ext cx="8412480" cy="340000"/>
+          </a:xfrm>
+          <a:prstGeom prst="rect">
+            <a:avLst/>
+          </a:prstGeom>
+          <a:noFill/>
+        </p:spPr>
+        <p:txBody>
+          <a:bodyPr wrap="square">
+            <a:spAutoFit/>
+          </a:bodyPr>
+          <a:lstStyle/>
+          <a:p>
+            <a:pPr algn="ctr"/>
+            <a:r>
+              <a:rPr sz="1100" i="1">
+                <a:solidFill>
+                  <a:srgbClr val="374151"/>
+                </a:solidFill>
+                <a:latin typeface="Calibri"/>
+              </a:rPr>
+              <a:t>R² en validation croisée selon alpha : le meilleur compromis est atteint pour alpha = 0,1.</a:t>
+            </a:r>
           </a:p>
         </p:txBody>
       </p:sp>
